--- a/assets/figures-editable/c1-c2/c1-e03.pptx
+++ b/assets/figures-editable/c1-c2/c1-e03.pptx
@@ -7,7 +7,7 @@
   <p:sldIdLst>
     <p:sldId id="256" r:id="rId7"/>
   </p:sldIdLst>
-  <p:sldSz cx="11948160" cy="7924799" type="screen4x3"/>
+  <p:sldSz cx="12191695" cy="6858000" type="screen4x3"/>
   <p:notesSz cx="6858000" cy="9144000"/>
   <p:defaultTextStyle>
     <a:defPPr>
@@ -3098,14 +3098,14 @@
       <p:grpSpPr/>
       <p:sp>
         <p:nvSpPr>
-          <p:cNvPr id="2" name="text1" descr="sci-ppt:C1-E03-001"/>
+          <p:cNvPr id="2" name="C1-E03 text 0" descr="sci-ppt:o000"/>
           <p:cNvSpPr txBox="1"/>
           <p:nvPr/>
         </p:nvSpPr>
         <p:spPr>
           <a:xfrm>
-            <a:off x="316992" y="268224"/>
-            <a:ext cx="11277600" cy="359054"/>
+            <a:off x="274320" y="118872"/>
+            <a:ext cx="11612880" cy="340105"/>
           </a:xfrm>
           <a:prstGeom prst="rect">
             <a:avLst/>
@@ -3114,7 +3114,7 @@
           <a:effectLst/>
         </p:spPr>
         <p:txBody>
-          <a:bodyPr wrap="none" lIns="27432" rIns="27432" tIns="18288" bIns="18288" anchor="ctr">
+          <a:bodyPr wrap="none" lIns="18288" rIns="18288" tIns="18288" bIns="18288" anchor="t">
             <a:spAutoFit/>
           </a:bodyPr>
           <a:lstStyle/>
@@ -3125,83 +3125,115 @@
               </a:spcAft>
             </a:pPr>
             <a:r>
-              <a:rPr sz="1823" b="0" i="0">
+              <a:rPr sz="1900" b="1" i="0">
                 <a:solidFill>
                   <a:srgbClr val="8EDBD4"/>
                 </a:solidFill>
                 <a:latin typeface="Arial"/>
               </a:rPr>
-              <a:t>C1-E03 | Physical-variable diagram</a:t>
-            </a:r>
-          </a:p>
-        </p:txBody>
-      </p:sp>
-      <p:sp>
-        <p:nvSpPr>
-          <p:cNvPr id="3" name="ellipse2" descr="sci-ppt:C1-E03-002"/>
-          <p:cNvSpPr/>
+              <a:t>C1-E03 · Derived velocity potential</a:t>
+            </a:r>
+          </a:p>
+        </p:txBody>
+      </p:sp>
+      <p:cxnSp>
+        <p:nvCxnSpPr>
+          <p:cNvPr id="3" name="C1-E03 line 1" descr="sci-ppt:o001"/>
+          <p:cNvCxnSpPr/>
           <p:nvPr/>
-        </p:nvSpPr>
-        <p:spPr>
-          <a:xfrm>
-            <a:off x="2072640" y="1402080"/>
-            <a:ext cx="2438400" cy="2438400"/>
-          </a:xfrm>
-          <a:prstGeom prst="ellipse">
+        </p:nvCxnSpPr>
+        <p:spPr>
+          <a:xfrm>
+            <a:off x="868680" y="5303520"/>
+            <a:ext cx="5760720" cy="0"/>
+          </a:xfrm>
+          <a:prstGeom prst="line">
             <a:avLst/>
           </a:prstGeom>
-          <a:solidFill>
-            <a:srgbClr val="213E4B"/>
-          </a:solidFill>
-          <a:ln w="21590">
+          <a:ln w="19050">
             <a:solidFill>
               <a:srgbClr val="B4C7D2"/>
             </a:solidFill>
           </a:ln>
           <a:effectLst/>
         </p:spPr>
-        <p:txBody>
-          <a:bodyPr rtlCol="0" anchor="ctr"/>
-          <a:lstStyle/>
-          <a:p>
-            <a:pPr algn="ctr"/>
-          </a:p>
-        </p:txBody>
-      </p:sp>
+      </p:cxnSp>
       <p:cxnSp>
         <p:nvCxnSpPr>
-          <p:cNvPr id="4" name="arrow3" descr="sci-ppt:C1-E03-003"/>
+          <p:cNvPr id="4" name="C1-E03 line 2" descr="sci-ppt:o002"/>
           <p:cNvCxnSpPr/>
           <p:nvPr/>
         </p:nvCxnSpPr>
         <p:spPr>
           <a:xfrm>
-            <a:off x="3291840" y="2621280"/>
-            <a:ext cx="1219200" cy="0"/>
+            <a:off x="868680" y="1371600"/>
+            <a:ext cx="0" cy="3931920"/>
           </a:xfrm>
           <a:prstGeom prst="line">
             <a:avLst/>
           </a:prstGeom>
-          <a:ln w="25400">
+          <a:ln w="19050">
             <a:solidFill>
-              <a:srgbClr val="8EDBD4"/>
+              <a:srgbClr val="B4C7D2"/>
             </a:solidFill>
-            <a:headEnd type="none" w="med" len="med"/>
-            <a:tailEnd type="triangle" w="med" len="med"/>
           </a:ln>
           <a:effectLst/>
         </p:spPr>
       </p:cxnSp>
-      <p:sp>
-        <p:nvSpPr>
-          <p:cNvPr id="5" name="text4" descr="sci-ppt:C1-E03-004"/>
+      <p:cxnSp>
+        <p:nvCxnSpPr>
+          <p:cNvPr id="5" name="C1-E03 line 3" descr="sci-ppt:o003"/>
+          <p:cNvCxnSpPr/>
+          <p:nvPr/>
+        </p:nvCxnSpPr>
+        <p:spPr>
+          <a:xfrm>
+            <a:off x="868680" y="5303520"/>
+            <a:ext cx="0" cy="64008"/>
+          </a:xfrm>
+          <a:prstGeom prst="line">
+            <a:avLst/>
+          </a:prstGeom>
+          <a:ln w="12700">
+            <a:solidFill>
+              <a:srgbClr val="B4C7D2"/>
+            </a:solidFill>
+          </a:ln>
+          <a:effectLst/>
+        </p:spPr>
+      </p:cxnSp>
+      <p:cxnSp>
+        <p:nvCxnSpPr>
+          <p:cNvPr id="6" name="C1-E03 line 4" descr="sci-ppt:o004"/>
+          <p:cNvCxnSpPr/>
+          <p:nvPr/>
+        </p:nvCxnSpPr>
+        <p:spPr>
+          <a:xfrm>
+            <a:off x="868680" y="1371600"/>
+            <a:ext cx="0" cy="3931920"/>
+          </a:xfrm>
+          <a:prstGeom prst="line">
+            <a:avLst/>
+          </a:prstGeom>
+          <a:ln w="7620">
+            <a:solidFill>
+              <a:srgbClr val="2E4756"/>
+            </a:solidFill>
+          </a:ln>
+          <a:effectLst/>
+        </p:spPr>
+      </p:cxnSp>
+      <p:sp>
+        <p:nvSpPr>
+          <p:cNvPr id="7" name="C1-E03 text 5" descr="sci-ppt:o005"/>
           <p:cNvSpPr txBox="1"/>
           <p:nvPr/>
         </p:nvSpPr>
         <p:spPr>
           <a:xfrm>
-            <a:off x="3474720" y="2133600"/>
-            <a:ext cx="1584960" cy="396849"/>
+            <a:off x="411479" y="5385816"/>
+            <a:ext cx="914400" cy="208407"/>
           </a:xfrm>
           <a:prstGeom prst="rect">
             <a:avLst/>
@@ -3210,7 +3242,843 @@
           <a:effectLst/>
         </p:spPr>
         <p:txBody>
-          <a:bodyPr wrap="none" lIns="27432" rIns="27432" tIns="18288" bIns="18288" anchor="ctr">
+          <a:bodyPr wrap="none" lIns="18288" rIns="18288" tIns="18288" bIns="18288" anchor="t">
+            <a:spAutoFit/>
+          </a:bodyPr>
+          <a:lstStyle/>
+          <a:p>
+            <a:pPr algn="ctr">
+              <a:spcAft>
+                <a:spcPts val="0"/>
+              </a:spcAft>
+            </a:pPr>
+            <a:r>
+              <a:rPr sz="1050" b="0" i="0">
+                <a:solidFill>
+                  <a:srgbClr val="B4C7D2"/>
+                </a:solidFill>
+                <a:latin typeface="Arial"/>
+              </a:rPr>
+              <a:t>1</a:t>
+            </a:r>
+          </a:p>
+        </p:txBody>
+      </p:sp>
+      <p:cxnSp>
+        <p:nvCxnSpPr>
+          <p:cNvPr id="8" name="C1-E03 line 6" descr="sci-ppt:o006"/>
+          <p:cNvCxnSpPr/>
+          <p:nvPr/>
+        </p:nvCxnSpPr>
+        <p:spPr>
+          <a:xfrm>
+            <a:off x="2308860" y="5303520"/>
+            <a:ext cx="0" cy="64008"/>
+          </a:xfrm>
+          <a:prstGeom prst="line">
+            <a:avLst/>
+          </a:prstGeom>
+          <a:ln w="12700">
+            <a:solidFill>
+              <a:srgbClr val="B4C7D2"/>
+            </a:solidFill>
+          </a:ln>
+          <a:effectLst/>
+        </p:spPr>
+      </p:cxnSp>
+      <p:cxnSp>
+        <p:nvCxnSpPr>
+          <p:cNvPr id="9" name="C1-E03 line 7" descr="sci-ppt:o007"/>
+          <p:cNvCxnSpPr/>
+          <p:nvPr/>
+        </p:nvCxnSpPr>
+        <p:spPr>
+          <a:xfrm>
+            <a:off x="2308860" y="1371600"/>
+            <a:ext cx="0" cy="3931920"/>
+          </a:xfrm>
+          <a:prstGeom prst="line">
+            <a:avLst/>
+          </a:prstGeom>
+          <a:ln w="7620">
+            <a:solidFill>
+              <a:srgbClr val="2E4756"/>
+            </a:solidFill>
+          </a:ln>
+          <a:effectLst/>
+        </p:spPr>
+      </p:cxnSp>
+      <p:sp>
+        <p:nvSpPr>
+          <p:cNvPr id="10" name="C1-E03 text 8" descr="sci-ppt:o008"/>
+          <p:cNvSpPr txBox="1"/>
+          <p:nvPr/>
+        </p:nvSpPr>
+        <p:spPr>
+          <a:xfrm>
+            <a:off x="1851660" y="5385816"/>
+            <a:ext cx="914400" cy="208407"/>
+          </a:xfrm>
+          <a:prstGeom prst="rect">
+            <a:avLst/>
+          </a:prstGeom>
+          <a:noFill/>
+          <a:effectLst/>
+        </p:spPr>
+        <p:txBody>
+          <a:bodyPr wrap="none" lIns="18288" rIns="18288" tIns="18288" bIns="18288" anchor="t">
+            <a:spAutoFit/>
+          </a:bodyPr>
+          <a:lstStyle/>
+          <a:p>
+            <a:pPr algn="ctr">
+              <a:spcAft>
+                <a:spcPts val="0"/>
+              </a:spcAft>
+            </a:pPr>
+            <a:r>
+              <a:rPr sz="1050" b="0" i="0">
+                <a:solidFill>
+                  <a:srgbClr val="B4C7D2"/>
+                </a:solidFill>
+                <a:latin typeface="Arial"/>
+              </a:rPr>
+              <a:t>2</a:t>
+            </a:r>
+          </a:p>
+        </p:txBody>
+      </p:sp>
+      <p:cxnSp>
+        <p:nvCxnSpPr>
+          <p:cNvPr id="11" name="C1-E03 line 9" descr="sci-ppt:o009"/>
+          <p:cNvCxnSpPr/>
+          <p:nvPr/>
+        </p:nvCxnSpPr>
+        <p:spPr>
+          <a:xfrm>
+            <a:off x="3749039" y="5303520"/>
+            <a:ext cx="0" cy="64008"/>
+          </a:xfrm>
+          <a:prstGeom prst="line">
+            <a:avLst/>
+          </a:prstGeom>
+          <a:ln w="12700">
+            <a:solidFill>
+              <a:srgbClr val="B4C7D2"/>
+            </a:solidFill>
+          </a:ln>
+          <a:effectLst/>
+        </p:spPr>
+      </p:cxnSp>
+      <p:cxnSp>
+        <p:nvCxnSpPr>
+          <p:cNvPr id="12" name="C1-E03 line 10" descr="sci-ppt:o010"/>
+          <p:cNvCxnSpPr/>
+          <p:nvPr/>
+        </p:nvCxnSpPr>
+        <p:spPr>
+          <a:xfrm>
+            <a:off x="3749039" y="1371600"/>
+            <a:ext cx="0" cy="3931920"/>
+          </a:xfrm>
+          <a:prstGeom prst="line">
+            <a:avLst/>
+          </a:prstGeom>
+          <a:ln w="7620">
+            <a:solidFill>
+              <a:srgbClr val="2E4756"/>
+            </a:solidFill>
+          </a:ln>
+          <a:effectLst/>
+        </p:spPr>
+      </p:cxnSp>
+      <p:sp>
+        <p:nvSpPr>
+          <p:cNvPr id="13" name="C1-E03 text 11" descr="sci-ppt:o011"/>
+          <p:cNvSpPr txBox="1"/>
+          <p:nvPr/>
+        </p:nvSpPr>
+        <p:spPr>
+          <a:xfrm>
+            <a:off x="3291839" y="5385816"/>
+            <a:ext cx="914400" cy="208407"/>
+          </a:xfrm>
+          <a:prstGeom prst="rect">
+            <a:avLst/>
+          </a:prstGeom>
+          <a:noFill/>
+          <a:effectLst/>
+        </p:spPr>
+        <p:txBody>
+          <a:bodyPr wrap="none" lIns="18288" rIns="18288" tIns="18288" bIns="18288" anchor="t">
+            <a:spAutoFit/>
+          </a:bodyPr>
+          <a:lstStyle/>
+          <a:p>
+            <a:pPr algn="ctr">
+              <a:spcAft>
+                <a:spcPts val="0"/>
+              </a:spcAft>
+            </a:pPr>
+            <a:r>
+              <a:rPr sz="1050" b="0" i="0">
+                <a:solidFill>
+                  <a:srgbClr val="B4C7D2"/>
+                </a:solidFill>
+                <a:latin typeface="Arial"/>
+              </a:rPr>
+              <a:t>3</a:t>
+            </a:r>
+          </a:p>
+        </p:txBody>
+      </p:sp>
+      <p:cxnSp>
+        <p:nvCxnSpPr>
+          <p:cNvPr id="14" name="C1-E03 line 12" descr="sci-ppt:o012"/>
+          <p:cNvCxnSpPr/>
+          <p:nvPr/>
+        </p:nvCxnSpPr>
+        <p:spPr>
+          <a:xfrm>
+            <a:off x="5189220" y="5303520"/>
+            <a:ext cx="0" cy="64008"/>
+          </a:xfrm>
+          <a:prstGeom prst="line">
+            <a:avLst/>
+          </a:prstGeom>
+          <a:ln w="12700">
+            <a:solidFill>
+              <a:srgbClr val="B4C7D2"/>
+            </a:solidFill>
+          </a:ln>
+          <a:effectLst/>
+        </p:spPr>
+      </p:cxnSp>
+      <p:cxnSp>
+        <p:nvCxnSpPr>
+          <p:cNvPr id="15" name="C1-E03 line 13" descr="sci-ppt:o013"/>
+          <p:cNvCxnSpPr/>
+          <p:nvPr/>
+        </p:nvCxnSpPr>
+        <p:spPr>
+          <a:xfrm>
+            <a:off x="5189220" y="1371600"/>
+            <a:ext cx="0" cy="3931920"/>
+          </a:xfrm>
+          <a:prstGeom prst="line">
+            <a:avLst/>
+          </a:prstGeom>
+          <a:ln w="7620">
+            <a:solidFill>
+              <a:srgbClr val="2E4756"/>
+            </a:solidFill>
+          </a:ln>
+          <a:effectLst/>
+        </p:spPr>
+      </p:cxnSp>
+      <p:sp>
+        <p:nvSpPr>
+          <p:cNvPr id="16" name="C1-E03 text 14" descr="sci-ppt:o014"/>
+          <p:cNvSpPr txBox="1"/>
+          <p:nvPr/>
+        </p:nvSpPr>
+        <p:spPr>
+          <a:xfrm>
+            <a:off x="4732020" y="5385816"/>
+            <a:ext cx="914400" cy="208407"/>
+          </a:xfrm>
+          <a:prstGeom prst="rect">
+            <a:avLst/>
+          </a:prstGeom>
+          <a:noFill/>
+          <a:effectLst/>
+        </p:spPr>
+        <p:txBody>
+          <a:bodyPr wrap="none" lIns="18288" rIns="18288" tIns="18288" bIns="18288" anchor="t">
+            <a:spAutoFit/>
+          </a:bodyPr>
+          <a:lstStyle/>
+          <a:p>
+            <a:pPr algn="ctr">
+              <a:spcAft>
+                <a:spcPts val="0"/>
+              </a:spcAft>
+            </a:pPr>
+            <a:r>
+              <a:rPr sz="1050" b="0" i="0">
+                <a:solidFill>
+                  <a:srgbClr val="B4C7D2"/>
+                </a:solidFill>
+                <a:latin typeface="Arial"/>
+              </a:rPr>
+              <a:t>4</a:t>
+            </a:r>
+          </a:p>
+        </p:txBody>
+      </p:sp>
+      <p:cxnSp>
+        <p:nvCxnSpPr>
+          <p:cNvPr id="17" name="C1-E03 line 15" descr="sci-ppt:o015"/>
+          <p:cNvCxnSpPr/>
+          <p:nvPr/>
+        </p:nvCxnSpPr>
+        <p:spPr>
+          <a:xfrm>
+            <a:off x="6629400" y="5303520"/>
+            <a:ext cx="0" cy="64008"/>
+          </a:xfrm>
+          <a:prstGeom prst="line">
+            <a:avLst/>
+          </a:prstGeom>
+          <a:ln w="12700">
+            <a:solidFill>
+              <a:srgbClr val="B4C7D2"/>
+            </a:solidFill>
+          </a:ln>
+          <a:effectLst/>
+        </p:spPr>
+      </p:cxnSp>
+      <p:cxnSp>
+        <p:nvCxnSpPr>
+          <p:cNvPr id="18" name="C1-E03 line 16" descr="sci-ppt:o016"/>
+          <p:cNvCxnSpPr/>
+          <p:nvPr/>
+        </p:nvCxnSpPr>
+        <p:spPr>
+          <a:xfrm>
+            <a:off x="6629400" y="1371600"/>
+            <a:ext cx="0" cy="3931920"/>
+          </a:xfrm>
+          <a:prstGeom prst="line">
+            <a:avLst/>
+          </a:prstGeom>
+          <a:ln w="7620">
+            <a:solidFill>
+              <a:srgbClr val="2E4756"/>
+            </a:solidFill>
+          </a:ln>
+          <a:effectLst/>
+        </p:spPr>
+      </p:cxnSp>
+      <p:sp>
+        <p:nvSpPr>
+          <p:cNvPr id="19" name="C1-E03 text 17" descr="sci-ppt:o017"/>
+          <p:cNvSpPr txBox="1"/>
+          <p:nvPr/>
+        </p:nvSpPr>
+        <p:spPr>
+          <a:xfrm>
+            <a:off x="6172200" y="5385816"/>
+            <a:ext cx="914400" cy="208407"/>
+          </a:xfrm>
+          <a:prstGeom prst="rect">
+            <a:avLst/>
+          </a:prstGeom>
+          <a:noFill/>
+          <a:effectLst/>
+        </p:spPr>
+        <p:txBody>
+          <a:bodyPr wrap="none" lIns="18288" rIns="18288" tIns="18288" bIns="18288" anchor="t">
+            <a:spAutoFit/>
+          </a:bodyPr>
+          <a:lstStyle/>
+          <a:p>
+            <a:pPr algn="ctr">
+              <a:spcAft>
+                <a:spcPts val="0"/>
+              </a:spcAft>
+            </a:pPr>
+            <a:r>
+              <a:rPr sz="1050" b="0" i="0">
+                <a:solidFill>
+                  <a:srgbClr val="B4C7D2"/>
+                </a:solidFill>
+                <a:latin typeface="Arial"/>
+              </a:rPr>
+              <a:t>5</a:t>
+            </a:r>
+          </a:p>
+        </p:txBody>
+      </p:sp>
+      <p:cxnSp>
+        <p:nvCxnSpPr>
+          <p:cNvPr id="20" name="C1-E03 line 18" descr="sci-ppt:o018"/>
+          <p:cNvCxnSpPr/>
+          <p:nvPr/>
+        </p:nvCxnSpPr>
+        <p:spPr>
+          <a:xfrm>
+            <a:off x="804671" y="5116285"/>
+            <a:ext cx="64009" cy="0"/>
+          </a:xfrm>
+          <a:prstGeom prst="line">
+            <a:avLst/>
+          </a:prstGeom>
+          <a:ln w="12700">
+            <a:solidFill>
+              <a:srgbClr val="B4C7D2"/>
+            </a:solidFill>
+          </a:ln>
+          <a:effectLst/>
+        </p:spPr>
+      </p:cxnSp>
+      <p:cxnSp>
+        <p:nvCxnSpPr>
+          <p:cNvPr id="21" name="C1-E03 line 19" descr="sci-ppt:o019"/>
+          <p:cNvCxnSpPr/>
+          <p:nvPr/>
+        </p:nvCxnSpPr>
+        <p:spPr>
+          <a:xfrm>
+            <a:off x="868680" y="5116285"/>
+            <a:ext cx="5760720" cy="0"/>
+          </a:xfrm>
+          <a:prstGeom prst="line">
+            <a:avLst/>
+          </a:prstGeom>
+          <a:ln w="7620">
+            <a:solidFill>
+              <a:srgbClr val="2E4756"/>
+            </a:solidFill>
+          </a:ln>
+          <a:effectLst/>
+        </p:spPr>
+      </p:cxnSp>
+      <p:sp>
+        <p:nvSpPr>
+          <p:cNvPr id="22" name="C1-E03 text 20" descr="sci-ppt:o020"/>
+          <p:cNvSpPr txBox="1"/>
+          <p:nvPr/>
+        </p:nvSpPr>
+        <p:spPr>
+          <a:xfrm>
+            <a:off x="0" y="5033989"/>
+            <a:ext cx="777240" cy="208407"/>
+          </a:xfrm>
+          <a:prstGeom prst="rect">
+            <a:avLst/>
+          </a:prstGeom>
+          <a:noFill/>
+          <a:effectLst/>
+        </p:spPr>
+        <p:txBody>
+          <a:bodyPr wrap="none" lIns="18288" rIns="18288" tIns="18288" bIns="18288" anchor="t">
+            <a:spAutoFit/>
+          </a:bodyPr>
+          <a:lstStyle/>
+          <a:p>
+            <a:pPr algn="r">
+              <a:spcAft>
+                <a:spcPts val="0"/>
+              </a:spcAft>
+            </a:pPr>
+            <a:r>
+              <a:rPr sz="1050" b="0" i="0">
+                <a:solidFill>
+                  <a:srgbClr val="B4C7D2"/>
+                </a:solidFill>
+                <a:latin typeface="Arial"/>
+              </a:rPr>
+              <a:t>-1.00</a:t>
+            </a:r>
+          </a:p>
+        </p:txBody>
+      </p:sp>
+      <p:cxnSp>
+        <p:nvCxnSpPr>
+          <p:cNvPr id="23" name="C1-E03 line 21" descr="sci-ppt:o021"/>
+          <p:cNvCxnSpPr/>
+          <p:nvPr/>
+        </p:nvCxnSpPr>
+        <p:spPr>
+          <a:xfrm>
+            <a:off x="804671" y="4180114"/>
+            <a:ext cx="64009" cy="0"/>
+          </a:xfrm>
+          <a:prstGeom prst="line">
+            <a:avLst/>
+          </a:prstGeom>
+          <a:ln w="12700">
+            <a:solidFill>
+              <a:srgbClr val="B4C7D2"/>
+            </a:solidFill>
+          </a:ln>
+          <a:effectLst/>
+        </p:spPr>
+      </p:cxnSp>
+      <p:cxnSp>
+        <p:nvCxnSpPr>
+          <p:cNvPr id="24" name="C1-E03 line 22" descr="sci-ppt:o022"/>
+          <p:cNvCxnSpPr/>
+          <p:nvPr/>
+        </p:nvCxnSpPr>
+        <p:spPr>
+          <a:xfrm>
+            <a:off x="868680" y="4180114"/>
+            <a:ext cx="5760720" cy="0"/>
+          </a:xfrm>
+          <a:prstGeom prst="line">
+            <a:avLst/>
+          </a:prstGeom>
+          <a:ln w="7620">
+            <a:solidFill>
+              <a:srgbClr val="2E4756"/>
+            </a:solidFill>
+          </a:ln>
+          <a:effectLst/>
+        </p:spPr>
+      </p:cxnSp>
+      <p:sp>
+        <p:nvSpPr>
+          <p:cNvPr id="25" name="C1-E03 text 23" descr="sci-ppt:o023"/>
+          <p:cNvSpPr txBox="1"/>
+          <p:nvPr/>
+        </p:nvSpPr>
+        <p:spPr>
+          <a:xfrm>
+            <a:off x="0" y="4097818"/>
+            <a:ext cx="777240" cy="208407"/>
+          </a:xfrm>
+          <a:prstGeom prst="rect">
+            <a:avLst/>
+          </a:prstGeom>
+          <a:noFill/>
+          <a:effectLst/>
+        </p:spPr>
+        <p:txBody>
+          <a:bodyPr wrap="none" lIns="18288" rIns="18288" tIns="18288" bIns="18288" anchor="t">
+            <a:spAutoFit/>
+          </a:bodyPr>
+          <a:lstStyle/>
+          <a:p>
+            <a:pPr algn="r">
+              <a:spcAft>
+                <a:spcPts val="0"/>
+              </a:spcAft>
+            </a:pPr>
+            <a:r>
+              <a:rPr sz="1050" b="0" i="0">
+                <a:solidFill>
+                  <a:srgbClr val="B4C7D2"/>
+                </a:solidFill>
+                <a:latin typeface="Arial"/>
+              </a:rPr>
+              <a:t>-0.75</a:t>
+            </a:r>
+          </a:p>
+        </p:txBody>
+      </p:sp>
+      <p:cxnSp>
+        <p:nvCxnSpPr>
+          <p:cNvPr id="26" name="C1-E03 line 24" descr="sci-ppt:o024"/>
+          <p:cNvCxnSpPr/>
+          <p:nvPr/>
+        </p:nvCxnSpPr>
+        <p:spPr>
+          <a:xfrm>
+            <a:off x="804671" y="3243942"/>
+            <a:ext cx="64009" cy="0"/>
+          </a:xfrm>
+          <a:prstGeom prst="line">
+            <a:avLst/>
+          </a:prstGeom>
+          <a:ln w="12700">
+            <a:solidFill>
+              <a:srgbClr val="B4C7D2"/>
+            </a:solidFill>
+          </a:ln>
+          <a:effectLst/>
+        </p:spPr>
+      </p:cxnSp>
+      <p:cxnSp>
+        <p:nvCxnSpPr>
+          <p:cNvPr id="27" name="C1-E03 line 25" descr="sci-ppt:o025"/>
+          <p:cNvCxnSpPr/>
+          <p:nvPr/>
+        </p:nvCxnSpPr>
+        <p:spPr>
+          <a:xfrm>
+            <a:off x="868680" y="3243942"/>
+            <a:ext cx="5760720" cy="0"/>
+          </a:xfrm>
+          <a:prstGeom prst="line">
+            <a:avLst/>
+          </a:prstGeom>
+          <a:ln w="7620">
+            <a:solidFill>
+              <a:srgbClr val="2E4756"/>
+            </a:solidFill>
+          </a:ln>
+          <a:effectLst/>
+        </p:spPr>
+      </p:cxnSp>
+      <p:sp>
+        <p:nvSpPr>
+          <p:cNvPr id="28" name="C1-E03 text 26" descr="sci-ppt:o026"/>
+          <p:cNvSpPr txBox="1"/>
+          <p:nvPr/>
+        </p:nvSpPr>
+        <p:spPr>
+          <a:xfrm>
+            <a:off x="0" y="3161646"/>
+            <a:ext cx="777240" cy="208407"/>
+          </a:xfrm>
+          <a:prstGeom prst="rect">
+            <a:avLst/>
+          </a:prstGeom>
+          <a:noFill/>
+          <a:effectLst/>
+        </p:spPr>
+        <p:txBody>
+          <a:bodyPr wrap="none" lIns="18288" rIns="18288" tIns="18288" bIns="18288" anchor="t">
+            <a:spAutoFit/>
+          </a:bodyPr>
+          <a:lstStyle/>
+          <a:p>
+            <a:pPr algn="r">
+              <a:spcAft>
+                <a:spcPts val="0"/>
+              </a:spcAft>
+            </a:pPr>
+            <a:r>
+              <a:rPr sz="1050" b="0" i="0">
+                <a:solidFill>
+                  <a:srgbClr val="B4C7D2"/>
+                </a:solidFill>
+                <a:latin typeface="Arial"/>
+              </a:rPr>
+              <a:t>-0.50</a:t>
+            </a:r>
+          </a:p>
+        </p:txBody>
+      </p:sp>
+      <p:cxnSp>
+        <p:nvCxnSpPr>
+          <p:cNvPr id="29" name="C1-E03 line 27" descr="sci-ppt:o027"/>
+          <p:cNvCxnSpPr/>
+          <p:nvPr/>
+        </p:nvCxnSpPr>
+        <p:spPr>
+          <a:xfrm>
+            <a:off x="804671" y="2307771"/>
+            <a:ext cx="64009" cy="0"/>
+          </a:xfrm>
+          <a:prstGeom prst="line">
+            <a:avLst/>
+          </a:prstGeom>
+          <a:ln w="12700">
+            <a:solidFill>
+              <a:srgbClr val="B4C7D2"/>
+            </a:solidFill>
+          </a:ln>
+          <a:effectLst/>
+        </p:spPr>
+      </p:cxnSp>
+      <p:cxnSp>
+        <p:nvCxnSpPr>
+          <p:cNvPr id="30" name="C1-E03 line 28" descr="sci-ppt:o028"/>
+          <p:cNvCxnSpPr/>
+          <p:nvPr/>
+        </p:nvCxnSpPr>
+        <p:spPr>
+          <a:xfrm>
+            <a:off x="868680" y="2307771"/>
+            <a:ext cx="5760720" cy="0"/>
+          </a:xfrm>
+          <a:prstGeom prst="line">
+            <a:avLst/>
+          </a:prstGeom>
+          <a:ln w="7620">
+            <a:solidFill>
+              <a:srgbClr val="2E4756"/>
+            </a:solidFill>
+          </a:ln>
+          <a:effectLst/>
+        </p:spPr>
+      </p:cxnSp>
+      <p:sp>
+        <p:nvSpPr>
+          <p:cNvPr id="31" name="C1-E03 text 29" descr="sci-ppt:o029"/>
+          <p:cNvSpPr txBox="1"/>
+          <p:nvPr/>
+        </p:nvSpPr>
+        <p:spPr>
+          <a:xfrm>
+            <a:off x="0" y="2225475"/>
+            <a:ext cx="777240" cy="208407"/>
+          </a:xfrm>
+          <a:prstGeom prst="rect">
+            <a:avLst/>
+          </a:prstGeom>
+          <a:noFill/>
+          <a:effectLst/>
+        </p:spPr>
+        <p:txBody>
+          <a:bodyPr wrap="none" lIns="18288" rIns="18288" tIns="18288" bIns="18288" anchor="t">
+            <a:spAutoFit/>
+          </a:bodyPr>
+          <a:lstStyle/>
+          <a:p>
+            <a:pPr algn="r">
+              <a:spcAft>
+                <a:spcPts val="0"/>
+              </a:spcAft>
+            </a:pPr>
+            <a:r>
+              <a:rPr sz="1050" b="0" i="0">
+                <a:solidFill>
+                  <a:srgbClr val="B4C7D2"/>
+                </a:solidFill>
+                <a:latin typeface="Arial"/>
+              </a:rPr>
+              <a:t>-0.25</a:t>
+            </a:r>
+          </a:p>
+        </p:txBody>
+      </p:sp>
+      <p:cxnSp>
+        <p:nvCxnSpPr>
+          <p:cNvPr id="32" name="C1-E03 line 30" descr="sci-ppt:o030"/>
+          <p:cNvCxnSpPr/>
+          <p:nvPr/>
+        </p:nvCxnSpPr>
+        <p:spPr>
+          <a:xfrm>
+            <a:off x="804671" y="1371600"/>
+            <a:ext cx="64009" cy="0"/>
+          </a:xfrm>
+          <a:prstGeom prst="line">
+            <a:avLst/>
+          </a:prstGeom>
+          <a:ln w="12700">
+            <a:solidFill>
+              <a:srgbClr val="B4C7D2"/>
+            </a:solidFill>
+          </a:ln>
+          <a:effectLst/>
+        </p:spPr>
+      </p:cxnSp>
+      <p:cxnSp>
+        <p:nvCxnSpPr>
+          <p:cNvPr id="33" name="C1-E03 line 31" descr="sci-ppt:o031"/>
+          <p:cNvCxnSpPr/>
+          <p:nvPr/>
+        </p:nvCxnSpPr>
+        <p:spPr>
+          <a:xfrm>
+            <a:off x="868680" y="1371600"/>
+            <a:ext cx="5760720" cy="0"/>
+          </a:xfrm>
+          <a:prstGeom prst="line">
+            <a:avLst/>
+          </a:prstGeom>
+          <a:ln w="7620">
+            <a:solidFill>
+              <a:srgbClr val="2E4756"/>
+            </a:solidFill>
+          </a:ln>
+          <a:effectLst/>
+        </p:spPr>
+      </p:cxnSp>
+      <p:sp>
+        <p:nvSpPr>
+          <p:cNvPr id="34" name="C1-E03 text 32" descr="sci-ppt:o032"/>
+          <p:cNvSpPr txBox="1"/>
+          <p:nvPr/>
+        </p:nvSpPr>
+        <p:spPr>
+          <a:xfrm>
+            <a:off x="0" y="1289304"/>
+            <a:ext cx="777240" cy="208407"/>
+          </a:xfrm>
+          <a:prstGeom prst="rect">
+            <a:avLst/>
+          </a:prstGeom>
+          <a:noFill/>
+          <a:effectLst/>
+        </p:spPr>
+        <p:txBody>
+          <a:bodyPr wrap="none" lIns="18288" rIns="18288" tIns="18288" bIns="18288" anchor="t">
+            <a:spAutoFit/>
+          </a:bodyPr>
+          <a:lstStyle/>
+          <a:p>
+            <a:pPr algn="r">
+              <a:spcAft>
+                <a:spcPts val="0"/>
+              </a:spcAft>
+            </a:pPr>
+            <a:r>
+              <a:rPr sz="1050" b="0" i="0">
+                <a:solidFill>
+                  <a:srgbClr val="B4C7D2"/>
+                </a:solidFill>
+                <a:latin typeface="Arial"/>
+              </a:rPr>
+              <a:t>0.00</a:t>
+            </a:r>
+          </a:p>
+        </p:txBody>
+      </p:sp>
+      <p:sp>
+        <p:nvSpPr>
+          <p:cNvPr id="35" name="C1-E03 text 33" descr="sci-ppt:o033"/>
+          <p:cNvSpPr txBox="1"/>
+          <p:nvPr/>
+        </p:nvSpPr>
+        <p:spPr>
+          <a:xfrm>
+            <a:off x="868680" y="5586983"/>
+            <a:ext cx="5760720" cy="231648"/>
+          </a:xfrm>
+          <a:prstGeom prst="rect">
+            <a:avLst/>
+          </a:prstGeom>
+          <a:noFill/>
+          <a:effectLst/>
+        </p:spPr>
+        <p:txBody>
+          <a:bodyPr wrap="none" lIns="18288" rIns="18288" tIns="18288" bIns="18288" anchor="t">
+            <a:spAutoFit/>
+          </a:bodyPr>
+          <a:lstStyle/>
+          <a:p>
+            <a:pPr algn="ctr">
+              <a:spcAft>
+                <a:spcPts val="0"/>
+              </a:spcAft>
+            </a:pPr>
+            <a:r>
+              <a:rPr sz="1200" b="0" i="0">
+                <a:solidFill>
+                  <a:srgbClr val="E7F0F3"/>
+                </a:solidFill>
+                <a:latin typeface="Arial"/>
+              </a:rPr>
+              <a:t>r / R</a:t>
+            </a:r>
+          </a:p>
+        </p:txBody>
+      </p:sp>
+      <p:sp>
+        <p:nvSpPr>
+          <p:cNvPr id="36" name="C1-E03 text 34" descr="sci-ppt:o034"/>
+          <p:cNvSpPr txBox="1"/>
+          <p:nvPr/>
+        </p:nvSpPr>
+        <p:spPr>
+          <a:xfrm>
+            <a:off x="320040" y="1024128"/>
+            <a:ext cx="5760720" cy="231648"/>
+          </a:xfrm>
+          <a:prstGeom prst="rect">
+            <a:avLst/>
+          </a:prstGeom>
+          <a:noFill/>
+          <a:effectLst/>
+        </p:spPr>
+        <p:txBody>
+          <a:bodyPr wrap="none" lIns="18288" rIns="18288" tIns="18288" bIns="18288" anchor="t">
             <a:spAutoFit/>
           </a:bodyPr>
           <a:lstStyle/>
@@ -3221,27 +4089,515 @@
               </a:spcAft>
             </a:pPr>
             <a:r>
-              <a:rPr sz="2016" b="0" i="0">
+              <a:rPr sz="1200" b="0" i="0">
                 <a:solidFill>
                   <a:srgbClr val="E7F0F3"/>
                 </a:solidFill>
                 <a:latin typeface="Arial"/>
               </a:rPr>
-              <a:t>R(t)</a:t>
-            </a:r>
-          </a:p>
-        </p:txBody>
-      </p:sp>
-      <p:sp>
-        <p:nvSpPr>
-          <p:cNvPr id="6" name="text5" descr="sci-ppt:C1-E03-005"/>
+              <a:t>φ / (R Ṙ)</a:t>
+            </a:r>
+          </a:p>
+        </p:txBody>
+      </p:sp>
+      <p:sp>
+        <p:nvSpPr>
+          <p:cNvPr id="37" name="C1-E03 polygon 35" descr="sci-ppt:o035"/>
+          <p:cNvSpPr/>
+          <p:nvPr/>
+        </p:nvSpPr>
+        <p:spPr>
+          <a:xfrm>
+            <a:off x="868680" y="2120537"/>
+            <a:ext cx="5760720" cy="2995748"/>
+          </a:xfrm>
+          <a:custGeom>
+            <a:avLst/>
+            <a:gdLst/>
+            <a:ahLst/>
+            <a:cxnLst/>
+            <a:rect l="l" t="t" r="r" b="b"/>
+            <a:pathLst>
+              <a:path w="5760720" h="2995748">
+                <a:moveTo>
+                  <a:pt x="0" y="2995748"/>
+                </a:moveTo>
+                <a:lnTo>
+                  <a:pt x="38662" y="2897848"/>
+                </a:lnTo>
+                <a:lnTo>
+                  <a:pt x="77325" y="2804936"/>
+                </a:lnTo>
+                <a:lnTo>
+                  <a:pt x="115987" y="2716641"/>
+                </a:lnTo>
+                <a:lnTo>
+                  <a:pt x="154650" y="2632627"/>
+                </a:lnTo>
+                <a:lnTo>
+                  <a:pt x="193312" y="2552590"/>
+                </a:lnTo>
+                <a:lnTo>
+                  <a:pt x="231975" y="2476254"/>
+                </a:lnTo>
+                <a:lnTo>
+                  <a:pt x="270637" y="2403369"/>
+                </a:lnTo>
+                <a:lnTo>
+                  <a:pt x="309300" y="2333704"/>
+                </a:lnTo>
+                <a:lnTo>
+                  <a:pt x="347962" y="2267053"/>
+                </a:lnTo>
+                <a:lnTo>
+                  <a:pt x="386625" y="2203222"/>
+                </a:lnTo>
+                <a:lnTo>
+                  <a:pt x="425288" y="2142037"/>
+                </a:lnTo>
+                <a:lnTo>
+                  <a:pt x="463950" y="2083337"/>
+                </a:lnTo>
+                <a:lnTo>
+                  <a:pt x="502613" y="2026974"/>
+                </a:lnTo>
+                <a:lnTo>
+                  <a:pt x="541275" y="1972810"/>
+                </a:lnTo>
+                <a:lnTo>
+                  <a:pt x="579938" y="1920719"/>
+                </a:lnTo>
+                <a:lnTo>
+                  <a:pt x="618600" y="1870584"/>
+                </a:lnTo>
+                <a:lnTo>
+                  <a:pt x="657263" y="1822298"/>
+                </a:lnTo>
+                <a:lnTo>
+                  <a:pt x="695925" y="1775760"/>
+                </a:lnTo>
+                <a:lnTo>
+                  <a:pt x="734588" y="1730877"/>
+                </a:lnTo>
+                <a:lnTo>
+                  <a:pt x="773251" y="1687561"/>
+                </a:lnTo>
+                <a:lnTo>
+                  <a:pt x="811913" y="1645733"/>
+                </a:lnTo>
+                <a:lnTo>
+                  <a:pt x="850576" y="1605316"/>
+                </a:lnTo>
+                <a:lnTo>
+                  <a:pt x="889238" y="1566242"/>
+                </a:lnTo>
+                <a:lnTo>
+                  <a:pt x="927901" y="1528443"/>
+                </a:lnTo>
+                <a:lnTo>
+                  <a:pt x="966563" y="1491858"/>
+                </a:lnTo>
+                <a:lnTo>
+                  <a:pt x="1005226" y="1456431"/>
+                </a:lnTo>
+                <a:lnTo>
+                  <a:pt x="1043888" y="1422106"/>
+                </a:lnTo>
+                <a:lnTo>
+                  <a:pt x="1082551" y="1388833"/>
+                </a:lnTo>
+                <a:lnTo>
+                  <a:pt x="1121213" y="1356565"/>
+                </a:lnTo>
+                <a:lnTo>
+                  <a:pt x="1159876" y="1325256"/>
+                </a:lnTo>
+                <a:lnTo>
+                  <a:pt x="1198539" y="1294865"/>
+                </a:lnTo>
+                <a:lnTo>
+                  <a:pt x="1237201" y="1265352"/>
+                </a:lnTo>
+                <a:lnTo>
+                  <a:pt x="1275864" y="1236679"/>
+                </a:lnTo>
+                <a:lnTo>
+                  <a:pt x="1314526" y="1208810"/>
+                </a:lnTo>
+                <a:lnTo>
+                  <a:pt x="1353189" y="1181714"/>
+                </a:lnTo>
+                <a:lnTo>
+                  <a:pt x="1391851" y="1155357"/>
+                </a:lnTo>
+                <a:lnTo>
+                  <a:pt x="1430514" y="1129710"/>
+                </a:lnTo>
+                <a:lnTo>
+                  <a:pt x="1469176" y="1104744"/>
+                </a:lnTo>
+                <a:lnTo>
+                  <a:pt x="1507839" y="1080434"/>
+                </a:lnTo>
+                <a:lnTo>
+                  <a:pt x="1546502" y="1056752"/>
+                </a:lnTo>
+                <a:lnTo>
+                  <a:pt x="1585164" y="1033676"/>
+                </a:lnTo>
+                <a:lnTo>
+                  <a:pt x="1623827" y="1011183"/>
+                </a:lnTo>
+                <a:lnTo>
+                  <a:pt x="1662489" y="989250"/>
+                </a:lnTo>
+                <a:lnTo>
+                  <a:pt x="1701152" y="967857"/>
+                </a:lnTo>
+                <a:lnTo>
+                  <a:pt x="1739814" y="946984"/>
+                </a:lnTo>
+                <a:lnTo>
+                  <a:pt x="1778477" y="926613"/>
+                </a:lnTo>
+                <a:lnTo>
+                  <a:pt x="1817139" y="906725"/>
+                </a:lnTo>
+                <a:lnTo>
+                  <a:pt x="1855802" y="887303"/>
+                </a:lnTo>
+                <a:lnTo>
+                  <a:pt x="1894464" y="868333"/>
+                </a:lnTo>
+                <a:lnTo>
+                  <a:pt x="1933127" y="849797"/>
+                </a:lnTo>
+                <a:lnTo>
+                  <a:pt x="1971790" y="831681"/>
+                </a:lnTo>
+                <a:lnTo>
+                  <a:pt x="2010452" y="813971"/>
+                </a:lnTo>
+                <a:lnTo>
+                  <a:pt x="2049115" y="796653"/>
+                </a:lnTo>
+                <a:lnTo>
+                  <a:pt x="2087777" y="779715"/>
+                </a:lnTo>
+                <a:lnTo>
+                  <a:pt x="2126440" y="763144"/>
+                </a:lnTo>
+                <a:lnTo>
+                  <a:pt x="2165102" y="746929"/>
+                </a:lnTo>
+                <a:lnTo>
+                  <a:pt x="2203765" y="731058"/>
+                </a:lnTo>
+                <a:lnTo>
+                  <a:pt x="2242427" y="715520"/>
+                </a:lnTo>
+                <a:lnTo>
+                  <a:pt x="2281090" y="700305"/>
+                </a:lnTo>
+                <a:lnTo>
+                  <a:pt x="2319753" y="685402"/>
+                </a:lnTo>
+                <a:lnTo>
+                  <a:pt x="2358415" y="670803"/>
+                </a:lnTo>
+                <a:lnTo>
+                  <a:pt x="2397078" y="656499"/>
+                </a:lnTo>
+                <a:lnTo>
+                  <a:pt x="2435740" y="642479"/>
+                </a:lnTo>
+                <a:lnTo>
+                  <a:pt x="2474403" y="628737"/>
+                </a:lnTo>
+                <a:lnTo>
+                  <a:pt x="2513065" y="615263"/>
+                </a:lnTo>
+                <a:lnTo>
+                  <a:pt x="2551728" y="602051"/>
+                </a:lnTo>
+                <a:lnTo>
+                  <a:pt x="2590390" y="589092"/>
+                </a:lnTo>
+                <a:lnTo>
+                  <a:pt x="2629053" y="576379"/>
+                </a:lnTo>
+                <a:lnTo>
+                  <a:pt x="2667715" y="563905"/>
+                </a:lnTo>
+                <a:lnTo>
+                  <a:pt x="2706378" y="551664"/>
+                </a:lnTo>
+                <a:lnTo>
+                  <a:pt x="2745041" y="539650"/>
+                </a:lnTo>
+                <a:lnTo>
+                  <a:pt x="2783703" y="527855"/>
+                </a:lnTo>
+                <a:lnTo>
+                  <a:pt x="2822366" y="516274"/>
+                </a:lnTo>
+                <a:lnTo>
+                  <a:pt x="2861028" y="504901"/>
+                </a:lnTo>
+                <a:lnTo>
+                  <a:pt x="2899691" y="493731"/>
+                </a:lnTo>
+                <a:lnTo>
+                  <a:pt x="2938353" y="482758"/>
+                </a:lnTo>
+                <a:lnTo>
+                  <a:pt x="2977016" y="471978"/>
+                </a:lnTo>
+                <a:lnTo>
+                  <a:pt x="3015678" y="461384"/>
+                </a:lnTo>
+                <a:lnTo>
+                  <a:pt x="3054341" y="450973"/>
+                </a:lnTo>
+                <a:lnTo>
+                  <a:pt x="3093004" y="440739"/>
+                </a:lnTo>
+                <a:lnTo>
+                  <a:pt x="3131666" y="430678"/>
+                </a:lnTo>
+                <a:lnTo>
+                  <a:pt x="3170329" y="420786"/>
+                </a:lnTo>
+                <a:lnTo>
+                  <a:pt x="3208991" y="411059"/>
+                </a:lnTo>
+                <a:lnTo>
+                  <a:pt x="3247654" y="401492"/>
+                </a:lnTo>
+                <a:lnTo>
+                  <a:pt x="3286316" y="392081"/>
+                </a:lnTo>
+                <a:lnTo>
+                  <a:pt x="3324979" y="382823"/>
+                </a:lnTo>
+                <a:lnTo>
+                  <a:pt x="3363641" y="373715"/>
+                </a:lnTo>
+                <a:lnTo>
+                  <a:pt x="3402304" y="364751"/>
+                </a:lnTo>
+                <a:lnTo>
+                  <a:pt x="3440966" y="355930"/>
+                </a:lnTo>
+                <a:lnTo>
+                  <a:pt x="3479629" y="347248"/>
+                </a:lnTo>
+                <a:lnTo>
+                  <a:pt x="3518292" y="338700"/>
+                </a:lnTo>
+                <a:lnTo>
+                  <a:pt x="3556954" y="330285"/>
+                </a:lnTo>
+                <a:lnTo>
+                  <a:pt x="3595617" y="321999"/>
+                </a:lnTo>
+                <a:lnTo>
+                  <a:pt x="3634279" y="313840"/>
+                </a:lnTo>
+                <a:lnTo>
+                  <a:pt x="3672942" y="305804"/>
+                </a:lnTo>
+                <a:lnTo>
+                  <a:pt x="3711604" y="297888"/>
+                </a:lnTo>
+                <a:lnTo>
+                  <a:pt x="3750267" y="290091"/>
+                </a:lnTo>
+                <a:lnTo>
+                  <a:pt x="3788929" y="282408"/>
+                </a:lnTo>
+                <a:lnTo>
+                  <a:pt x="3827592" y="274839"/>
+                </a:lnTo>
+                <a:lnTo>
+                  <a:pt x="3866255" y="267380"/>
+                </a:lnTo>
+                <a:lnTo>
+                  <a:pt x="3904917" y="260028"/>
+                </a:lnTo>
+                <a:lnTo>
+                  <a:pt x="3943580" y="252783"/>
+                </a:lnTo>
+                <a:lnTo>
+                  <a:pt x="3982242" y="245640"/>
+                </a:lnTo>
+                <a:lnTo>
+                  <a:pt x="4020905" y="238599"/>
+                </a:lnTo>
+                <a:lnTo>
+                  <a:pt x="4059567" y="231657"/>
+                </a:lnTo>
+                <a:lnTo>
+                  <a:pt x="4098230" y="224811"/>
+                </a:lnTo>
+                <a:lnTo>
+                  <a:pt x="4136892" y="218061"/>
+                </a:lnTo>
+                <a:lnTo>
+                  <a:pt x="4175555" y="211404"/>
+                </a:lnTo>
+                <a:lnTo>
+                  <a:pt x="4214217" y="204837"/>
+                </a:lnTo>
+                <a:lnTo>
+                  <a:pt x="4252880" y="198360"/>
+                </a:lnTo>
+                <a:lnTo>
+                  <a:pt x="4291543" y="191970"/>
+                </a:lnTo>
+                <a:lnTo>
+                  <a:pt x="4330205" y="185666"/>
+                </a:lnTo>
+                <a:lnTo>
+                  <a:pt x="4368868" y="179445"/>
+                </a:lnTo>
+                <a:lnTo>
+                  <a:pt x="4407530" y="173307"/>
+                </a:lnTo>
+                <a:lnTo>
+                  <a:pt x="4446193" y="167250"/>
+                </a:lnTo>
+                <a:lnTo>
+                  <a:pt x="4484855" y="161272"/>
+                </a:lnTo>
+                <a:lnTo>
+                  <a:pt x="4523518" y="155371"/>
+                </a:lnTo>
+                <a:lnTo>
+                  <a:pt x="4562180" y="149546"/>
+                </a:lnTo>
+                <a:lnTo>
+                  <a:pt x="4600843" y="143796"/>
+                </a:lnTo>
+                <a:lnTo>
+                  <a:pt x="4639506" y="138118"/>
+                </a:lnTo>
+                <a:lnTo>
+                  <a:pt x="4678168" y="132513"/>
+                </a:lnTo>
+                <a:lnTo>
+                  <a:pt x="4716831" y="126978"/>
+                </a:lnTo>
+                <a:lnTo>
+                  <a:pt x="4755493" y="121512"/>
+                </a:lnTo>
+                <a:lnTo>
+                  <a:pt x="4794156" y="116114"/>
+                </a:lnTo>
+                <a:lnTo>
+                  <a:pt x="4832818" y="110782"/>
+                </a:lnTo>
+                <a:lnTo>
+                  <a:pt x="4871481" y="105516"/>
+                </a:lnTo>
+                <a:lnTo>
+                  <a:pt x="4910143" y="100314"/>
+                </a:lnTo>
+                <a:lnTo>
+                  <a:pt x="4948806" y="95175"/>
+                </a:lnTo>
+                <a:lnTo>
+                  <a:pt x="4987468" y="90097"/>
+                </a:lnTo>
+                <a:lnTo>
+                  <a:pt x="5026131" y="85081"/>
+                </a:lnTo>
+                <a:lnTo>
+                  <a:pt x="5064794" y="80124"/>
+                </a:lnTo>
+                <a:lnTo>
+                  <a:pt x="5103456" y="75225"/>
+                </a:lnTo>
+                <a:lnTo>
+                  <a:pt x="5142119" y="70384"/>
+                </a:lnTo>
+                <a:lnTo>
+                  <a:pt x="5180781" y="65600"/>
+                </a:lnTo>
+                <a:lnTo>
+                  <a:pt x="5219444" y="60871"/>
+                </a:lnTo>
+                <a:lnTo>
+                  <a:pt x="5258106" y="56197"/>
+                </a:lnTo>
+                <a:lnTo>
+                  <a:pt x="5296769" y="51576"/>
+                </a:lnTo>
+                <a:lnTo>
+                  <a:pt x="5335431" y="47009"/>
+                </a:lnTo>
+                <a:lnTo>
+                  <a:pt x="5374094" y="42493"/>
+                </a:lnTo>
+                <a:lnTo>
+                  <a:pt x="5412757" y="38027"/>
+                </a:lnTo>
+                <a:lnTo>
+                  <a:pt x="5451419" y="33613"/>
+                </a:lnTo>
+                <a:lnTo>
+                  <a:pt x="5490082" y="29247"/>
+                </a:lnTo>
+                <a:lnTo>
+                  <a:pt x="5528744" y="24930"/>
+                </a:lnTo>
+                <a:lnTo>
+                  <a:pt x="5567407" y="20660"/>
+                </a:lnTo>
+                <a:lnTo>
+                  <a:pt x="5606069" y="16437"/>
+                </a:lnTo>
+                <a:lnTo>
+                  <a:pt x="5644732" y="12261"/>
+                </a:lnTo>
+                <a:lnTo>
+                  <a:pt x="5683394" y="8129"/>
+                </a:lnTo>
+                <a:lnTo>
+                  <a:pt x="5722057" y="4042"/>
+                </a:lnTo>
+                <a:lnTo>
+                  <a:pt x="5760720" y="0"/>
+                </a:lnTo>
+              </a:path>
+            </a:pathLst>
+          </a:custGeom>
+          <a:noFill/>
+          <a:ln w="38100">
+            <a:solidFill>
+              <a:srgbClr val="8EDBD4"/>
+            </a:solidFill>
+          </a:ln>
+          <a:effectLst/>
+        </p:spPr>
+        <p:txBody>
+          <a:bodyPr rtlCol="0" anchor="ctr"/>
+          <a:lstStyle/>
+          <a:p>
+            <a:pPr algn="ctr"/>
+          </a:p>
+        </p:txBody>
+      </p:sp>
+      <p:sp>
+        <p:nvSpPr>
+          <p:cNvPr id="38" name="C1-E03 text 36" descr="sci-ppt:o036"/>
           <p:cNvSpPr txBox="1"/>
           <p:nvPr/>
         </p:nvSpPr>
         <p:spPr>
           <a:xfrm>
-            <a:off x="2682240" y="2804160"/>
-            <a:ext cx="2194560" cy="377952"/>
+            <a:off x="3678174" y="2973977"/>
+            <a:ext cx="2743200" cy="247142"/>
           </a:xfrm>
           <a:prstGeom prst="rect">
             <a:avLst/>
@@ -3250,7 +4606,7 @@
           <a:effectLst/>
         </p:spPr>
         <p:txBody>
-          <a:bodyPr wrap="none" lIns="27432" rIns="27432" tIns="18288" bIns="18288" anchor="ctr">
+          <a:bodyPr wrap="none" lIns="18288" rIns="18288" tIns="18288" bIns="18288" anchor="t">
             <a:spAutoFit/>
           </a:bodyPr>
           <a:lstStyle/>
@@ -3261,27 +4617,290 @@
               </a:spcAft>
             </a:pPr>
             <a:r>
-              <a:rPr sz="1920" b="0" i="0">
+              <a:rPr sz="1300" b="0" i="0">
+                <a:solidFill>
+                  <a:srgbClr val="8EDBD4"/>
+                </a:solidFill>
+                <a:latin typeface="Arial"/>
+              </a:rPr>
+              <a:t>φ = −R²Ṙ / r → 0 at infinity</a:t>
+            </a:r>
+          </a:p>
+        </p:txBody>
+      </p:sp>
+      <p:sp>
+        <p:nvSpPr>
+          <p:cNvPr id="39" name="C1-E03 ellipse 37" descr="sci-ppt:o037"/>
+          <p:cNvSpPr/>
+          <p:nvPr/>
+        </p:nvSpPr>
+        <p:spPr>
+          <a:xfrm>
+            <a:off x="1659636" y="3638876"/>
+            <a:ext cx="146304" cy="146304"/>
+          </a:xfrm>
+          <a:prstGeom prst="ellipse">
+            <a:avLst/>
+          </a:prstGeom>
+          <a:solidFill>
+            <a:srgbClr val="F2B880"/>
+          </a:solidFill>
+          <a:ln w="12700">
+            <a:solidFill>
+              <a:srgbClr val="F2B880"/>
+            </a:solidFill>
+          </a:ln>
+          <a:effectLst/>
+        </p:spPr>
+        <p:txBody>
+          <a:bodyPr rtlCol="0" anchor="ctr"/>
+          <a:lstStyle/>
+          <a:p>
+            <a:pPr algn="ctr"/>
+          </a:p>
+        </p:txBody>
+      </p:sp>
+      <p:cxnSp>
+        <p:nvCxnSpPr>
+          <p:cNvPr id="40" name="C1-E03 line 38" descr="sci-ppt:o038"/>
+          <p:cNvCxnSpPr/>
+          <p:nvPr/>
+        </p:nvCxnSpPr>
+        <p:spPr>
+          <a:xfrm flipV="1">
+            <a:off x="1012698" y="2395537"/>
+            <a:ext cx="2016252" cy="2047875"/>
+          </a:xfrm>
+          <a:prstGeom prst="line">
+            <a:avLst/>
+          </a:prstGeom>
+          <a:ln w="22860">
+            <a:solidFill>
+              <a:srgbClr val="F2B880"/>
+            </a:solidFill>
+            <a:prstDash val="dash"/>
+          </a:ln>
+          <a:effectLst/>
+        </p:spPr>
+      </p:cxnSp>
+      <p:sp>
+        <p:nvSpPr>
+          <p:cNvPr id="41" name="C1-E03 text 39" descr="sci-ppt:o039"/>
+          <p:cNvSpPr txBox="1"/>
+          <p:nvPr/>
+        </p:nvSpPr>
+        <p:spPr>
+          <a:xfrm>
+            <a:off x="2189988" y="3986348"/>
+            <a:ext cx="3291840" cy="417576"/>
+          </a:xfrm>
+          <a:prstGeom prst="rect">
+            <a:avLst/>
+          </a:prstGeom>
+          <a:noFill/>
+          <a:effectLst/>
+        </p:spPr>
+        <p:txBody>
+          <a:bodyPr wrap="none" lIns="18288" rIns="18288" tIns="18288" bIns="18288" anchor="t">
+            <a:spAutoFit/>
+          </a:bodyPr>
+          <a:lstStyle/>
+          <a:p>
+            <a:pPr algn="l">
+              <a:spcAft>
+                <a:spcPts val="0"/>
+              </a:spcAft>
+            </a:pPr>
+            <a:r>
+              <a:rPr sz="1200" b="0" i="0">
+                <a:solidFill>
+                  <a:srgbClr val="F2B880"/>
+                </a:solidFill>
+                <a:latin typeface="Arial"/>
+              </a:rPr>
+              <a:t>tangent slope at r = 1.6R is u = (R/r)²Ṙ</a:t>
+            </a:r>
+          </a:p>
+          <a:p>
+            <a:pPr algn="l">
+              <a:spcAft>
+                <a:spcPts val="0"/>
+              </a:spcAft>
+            </a:pPr>
+            <a:r>
+              <a:rPr sz="1200" b="0" i="0">
+                <a:solidFill>
+                  <a:srgbClr val="F2B880"/>
+                </a:solidFill>
+                <a:latin typeface="Arial"/>
+              </a:rPr>
+              <a:t>= 0.39 Ṙ</a:t>
+            </a:r>
+          </a:p>
+        </p:txBody>
+      </p:sp>
+      <p:sp>
+        <p:nvSpPr>
+          <p:cNvPr id="42" name="C1-E03 round_rect 40" descr="sci-ppt:o040"/>
+          <p:cNvSpPr/>
+          <p:nvPr/>
+        </p:nvSpPr>
+        <p:spPr>
+          <a:xfrm>
+            <a:off x="7040880" y="1325880"/>
+            <a:ext cx="4800600" cy="4480560"/>
+          </a:xfrm>
+          <a:prstGeom prst="roundRect">
+            <a:avLst/>
+          </a:prstGeom>
+          <a:solidFill>
+            <a:srgbClr val="213E4B"/>
+          </a:solidFill>
+          <a:ln w="20320">
+            <a:solidFill>
+              <a:srgbClr val="8EDBD4"/>
+            </a:solidFill>
+          </a:ln>
+          <a:effectLst/>
+        </p:spPr>
+        <p:txBody>
+          <a:bodyPr rtlCol="0" anchor="ctr"/>
+          <a:lstStyle/>
+          <a:p>
+            <a:pPr algn="ctr"/>
+          </a:p>
+        </p:txBody>
+      </p:sp>
+      <p:sp>
+        <p:nvSpPr>
+          <p:cNvPr id="43" name="C1-E03 text 41" descr="sci-ppt:o041"/>
+          <p:cNvSpPr txBox="1"/>
+          <p:nvPr/>
+        </p:nvSpPr>
+        <p:spPr>
+          <a:xfrm>
+            <a:off x="7150608" y="1380744"/>
+            <a:ext cx="4581144" cy="254889"/>
+          </a:xfrm>
+          <a:prstGeom prst="rect">
+            <a:avLst/>
+          </a:prstGeom>
+          <a:noFill/>
+          <a:effectLst/>
+        </p:spPr>
+        <p:txBody>
+          <a:bodyPr wrap="none" lIns="18288" rIns="18288" tIns="18288" bIns="18288" anchor="t">
+            <a:spAutoFit/>
+          </a:bodyPr>
+          <a:lstStyle/>
+          <a:p>
+            <a:pPr algn="l">
+              <a:spcAft>
+                <a:spcPts val="0"/>
+              </a:spcAft>
+            </a:pPr>
+            <a:r>
+              <a:rPr sz="1350" b="1" i="0">
+                <a:solidFill>
+                  <a:srgbClr val="8EDBD4"/>
+                </a:solidFill>
+                <a:latin typeface="Arial"/>
+              </a:rPr>
+              <a:t>Derivation in three moves</a:t>
+            </a:r>
+          </a:p>
+        </p:txBody>
+      </p:sp>
+      <p:sp>
+        <p:nvSpPr>
+          <p:cNvPr id="44" name="C1-E03 text 42" descr="sci-ppt:o042"/>
+          <p:cNvSpPr txBox="1"/>
+          <p:nvPr/>
+        </p:nvSpPr>
+        <p:spPr>
+          <a:xfrm>
+            <a:off x="7223760" y="1783080"/>
+            <a:ext cx="4480560" cy="247142"/>
+          </a:xfrm>
+          <a:prstGeom prst="rect">
+            <a:avLst/>
+          </a:prstGeom>
+          <a:noFill/>
+          <a:effectLst/>
+        </p:spPr>
+        <p:txBody>
+          <a:bodyPr wrap="none" lIns="18288" rIns="18288" tIns="18288" bIns="18288" anchor="t">
+            <a:spAutoFit/>
+          </a:bodyPr>
+          <a:lstStyle/>
+          <a:p>
+            <a:pPr algn="l">
+              <a:spcAft>
+                <a:spcPts val="0"/>
+              </a:spcAft>
+            </a:pPr>
+            <a:r>
+              <a:rPr sz="1300" b="1" i="0">
+                <a:solidFill>
+                  <a:srgbClr val="F2B880"/>
+                </a:solidFill>
+                <a:latin typeface="Arial"/>
+              </a:rPr>
+              <a:t>1  Start from the flux law</a:t>
+            </a:r>
+          </a:p>
+        </p:txBody>
+      </p:sp>
+      <p:sp>
+        <p:nvSpPr>
+          <p:cNvPr id="45" name="C1-E03 text 43" descr="sci-ppt:o043"/>
+          <p:cNvSpPr txBox="1"/>
+          <p:nvPr/>
+        </p:nvSpPr>
+        <p:spPr>
+          <a:xfrm>
+            <a:off x="7360920" y="2030221"/>
+            <a:ext cx="4297680" cy="239395"/>
+          </a:xfrm>
+          <a:prstGeom prst="rect">
+            <a:avLst/>
+          </a:prstGeom>
+          <a:noFill/>
+          <a:effectLst/>
+        </p:spPr>
+        <p:txBody>
+          <a:bodyPr wrap="none" lIns="18288" rIns="18288" tIns="18288" bIns="18288" anchor="t">
+            <a:spAutoFit/>
+          </a:bodyPr>
+          <a:lstStyle/>
+          <a:p>
+            <a:pPr algn="l">
+              <a:spcAft>
+                <a:spcPts val="0"/>
+              </a:spcAft>
+            </a:pPr>
+            <a:r>
+              <a:rPr sz="1250" b="0" i="0">
                 <a:solidFill>
                   <a:srgbClr val="E7F0F3"/>
                 </a:solidFill>
                 <a:latin typeface="Arial"/>
               </a:rPr>
-              <a:t>p_b</a:t>
-            </a:r>
-          </a:p>
-        </p:txBody>
-      </p:sp>
-      <p:sp>
-        <p:nvSpPr>
-          <p:cNvPr id="7" name="text6" descr="sci-ppt:C1-E03-006"/>
+              <a:t>u(s) = R²Ṙ / s²</a:t>
+            </a:r>
+          </a:p>
+        </p:txBody>
+      </p:sp>
+      <p:sp>
+        <p:nvSpPr>
+          <p:cNvPr id="46" name="C1-E03 text 44" descr="sci-ppt:o044"/>
           <p:cNvSpPr txBox="1"/>
           <p:nvPr/>
         </p:nvSpPr>
         <p:spPr>
           <a:xfrm>
-            <a:off x="5242560" y="1524000"/>
-            <a:ext cx="4876800" cy="415747"/>
+            <a:off x="7223760" y="2415921"/>
+            <a:ext cx="4480560" cy="247142"/>
           </a:xfrm>
           <a:prstGeom prst="rect">
             <a:avLst/>
@@ -3290,7 +4909,7 @@
           <a:effectLst/>
         </p:spPr>
         <p:txBody>
-          <a:bodyPr wrap="none" lIns="27432" rIns="27432" tIns="18288" bIns="18288" anchor="ctr">
+          <a:bodyPr wrap="none" lIns="18288" rIns="18288" tIns="18288" bIns="18288" anchor="t">
             <a:spAutoFit/>
           </a:bodyPr>
           <a:lstStyle/>
@@ -3301,39 +4920,55 @@
               </a:spcAft>
             </a:pPr>
             <a:r>
-              <a:rPr sz="2111" b="0" i="0">
+              <a:rPr sz="1300" b="1" i="0">
+                <a:solidFill>
+                  <a:srgbClr val="F2B880"/>
+                </a:solidFill>
+                <a:latin typeface="Arial"/>
+              </a:rPr>
+              <a:t>2  Integrate inward from infinity</a:t>
+            </a:r>
+          </a:p>
+        </p:txBody>
+      </p:sp>
+      <p:sp>
+        <p:nvSpPr>
+          <p:cNvPr id="47" name="C1-E03 text 45" descr="sci-ppt:o045"/>
+          <p:cNvSpPr txBox="1"/>
+          <p:nvPr/>
+        </p:nvSpPr>
+        <p:spPr>
+          <a:xfrm>
+            <a:off x="7360920" y="2663063"/>
+            <a:ext cx="4297680" cy="433070"/>
+          </a:xfrm>
+          <a:prstGeom prst="rect">
+            <a:avLst/>
+          </a:prstGeom>
+          <a:noFill/>
+          <a:effectLst/>
+        </p:spPr>
+        <p:txBody>
+          <a:bodyPr wrap="none" lIns="18288" rIns="18288" tIns="18288" bIns="18288" anchor="t">
+            <a:spAutoFit/>
+          </a:bodyPr>
+          <a:lstStyle/>
+          <a:p>
+            <a:pPr algn="l">
+              <a:spcAft>
+                <a:spcPts val="0"/>
+              </a:spcAft>
+            </a:pPr>
+            <a:r>
+              <a:rPr sz="1250" b="0" i="0">
                 <a:solidFill>
                   <a:srgbClr val="E7F0F3"/>
                 </a:solidFill>
                 <a:latin typeface="Arial"/>
               </a:rPr>
-              <a:t>Surrounding liquid</a:t>
-            </a:r>
-          </a:p>
-        </p:txBody>
-      </p:sp>
-      <p:sp>
-        <p:nvSpPr>
-          <p:cNvPr id="8" name="text7" descr="sci-ppt:C1-E03-007"/>
-          <p:cNvSpPr txBox="1"/>
-          <p:nvPr/>
-        </p:nvSpPr>
-        <p:spPr>
-          <a:xfrm>
-            <a:off x="5242560" y="1987296"/>
-            <a:ext cx="5852160" cy="359054"/>
-          </a:xfrm>
-          <a:prstGeom prst="rect">
-            <a:avLst/>
-          </a:prstGeom>
-          <a:noFill/>
-          <a:effectLst/>
-        </p:spPr>
-        <p:txBody>
-          <a:bodyPr wrap="none" lIns="27432" rIns="27432" tIns="18288" bIns="18288" anchor="ctr">
-            <a:spAutoFit/>
-          </a:bodyPr>
-          <a:lstStyle/>
+              <a:t>φ(r) = ∫ u ds from ∞ to r</a:t>
+            </a:r>
+          </a:p>
           <a:p>
             <a:pPr algn="l">
               <a:spcAft>
@@ -3341,51 +4976,27 @@
               </a:spcAft>
             </a:pPr>
             <a:r>
-              <a:rPr sz="1823" b="0" i="0">
+              <a:rPr sz="1250" b="0" i="0">
                 <a:solidFill>
                   <a:srgbClr val="E7F0F3"/>
                 </a:solidFill>
                 <a:latin typeface="Arial"/>
               </a:rPr>
-              <a:t>p∞, ρ, μ; interface: σ</a:t>
-            </a:r>
-          </a:p>
-        </p:txBody>
-      </p:sp>
-      <p:cxnSp>
-        <p:nvCxnSpPr>
-          <p:cNvPr id="9" name="arrow8" descr="sci-ppt:C1-E03-008"/>
-          <p:cNvCxnSpPr/>
-          <p:nvPr/>
-        </p:nvCxnSpPr>
-        <p:spPr>
-          <a:xfrm>
-            <a:off x="3291840" y="2621280"/>
-            <a:ext cx="1706880" cy="1158240"/>
-          </a:xfrm>
-          <a:prstGeom prst="line">
-            <a:avLst/>
-          </a:prstGeom>
-          <a:ln w="25400">
-            <a:solidFill>
-              <a:srgbClr val="8EDBD4"/>
-            </a:solidFill>
-            <a:headEnd type="none" w="med" len="med"/>
-            <a:tailEnd type="triangle" w="med" len="med"/>
-          </a:ln>
-          <a:effectLst/>
-        </p:spPr>
-      </p:cxnSp>
-      <p:sp>
-        <p:nvSpPr>
-          <p:cNvPr id="10" name="text9" descr="sci-ppt:C1-E03-009"/>
+              <a:t>φ(r) = −R²Ṙ / r</a:t>
+            </a:r>
+          </a:p>
+        </p:txBody>
+      </p:sp>
+      <p:sp>
+        <p:nvSpPr>
+          <p:cNvPr id="48" name="C1-E03 text 46" descr="sci-ppt:o046"/>
           <p:cNvSpPr txBox="1"/>
           <p:nvPr/>
         </p:nvSpPr>
         <p:spPr>
           <a:xfrm>
-            <a:off x="5364480" y="3657600"/>
-            <a:ext cx="1950720" cy="340156"/>
+            <a:off x="7223760" y="3242437"/>
+            <a:ext cx="4480560" cy="247142"/>
           </a:xfrm>
           <a:prstGeom prst="rect">
             <a:avLst/>
@@ -3394,7 +5005,7 @@
           <a:effectLst/>
         </p:spPr>
         <p:txBody>
-          <a:bodyPr wrap="none" lIns="27432" rIns="27432" tIns="18288" bIns="18288" anchor="ctr">
+          <a:bodyPr wrap="none" lIns="18288" rIns="18288" tIns="18288" bIns="18288" anchor="t">
             <a:spAutoFit/>
           </a:bodyPr>
           <a:lstStyle/>
@@ -3405,51 +5016,67 @@
               </a:spcAft>
             </a:pPr>
             <a:r>
-              <a:rPr sz="1728" b="0" i="0">
+              <a:rPr sz="1300" b="1" i="0">
+                <a:solidFill>
+                  <a:srgbClr val="F2B880"/>
+                </a:solidFill>
+                <a:latin typeface="Arial"/>
+              </a:rPr>
+              <a:t>3  Differentiate in space</a:t>
+            </a:r>
+          </a:p>
+        </p:txBody>
+      </p:sp>
+      <p:sp>
+        <p:nvSpPr>
+          <p:cNvPr id="49" name="C1-E03 text 47" descr="sci-ppt:o047"/>
+          <p:cNvSpPr txBox="1"/>
+          <p:nvPr/>
+        </p:nvSpPr>
+        <p:spPr>
+          <a:xfrm>
+            <a:off x="7360920" y="3489579"/>
+            <a:ext cx="4297680" cy="239395"/>
+          </a:xfrm>
+          <a:prstGeom prst="rect">
+            <a:avLst/>
+          </a:prstGeom>
+          <a:noFill/>
+          <a:effectLst/>
+        </p:spPr>
+        <p:txBody>
+          <a:bodyPr wrap="none" lIns="18288" rIns="18288" tIns="18288" bIns="18288" anchor="t">
+            <a:spAutoFit/>
+          </a:bodyPr>
+          <a:lstStyle/>
+          <a:p>
+            <a:pPr algn="l">
+              <a:spcAft>
+                <a:spcPts val="0"/>
+              </a:spcAft>
+            </a:pPr>
+            <a:r>
+              <a:rPr sz="1250" b="0" i="0">
                 <a:solidFill>
                   <a:srgbClr val="E7F0F3"/>
                 </a:solidFill>
                 <a:latin typeface="Arial"/>
               </a:rPr>
-              <a:t>r ≥ R</a:t>
-            </a:r>
-          </a:p>
-        </p:txBody>
-      </p:sp>
-      <p:cxnSp>
-        <p:nvCxnSpPr>
-          <p:cNvPr id="11" name="arrow10" descr="sci-ppt:C1-E03-010"/>
-          <p:cNvCxnSpPr/>
-          <p:nvPr/>
-        </p:nvCxnSpPr>
-        <p:spPr>
-          <a:xfrm>
-            <a:off x="4998720" y="2621280"/>
-            <a:ext cx="792480" cy="0"/>
-          </a:xfrm>
-          <a:prstGeom prst="line">
-            <a:avLst/>
-          </a:prstGeom>
-          <a:ln w="25400">
-            <a:solidFill>
-              <a:srgbClr val="8EDBD4"/>
-            </a:solidFill>
-            <a:headEnd type="none" w="med" len="med"/>
-            <a:tailEnd type="triangle" w="med" len="med"/>
-          </a:ln>
-          <a:effectLst/>
-        </p:spPr>
-      </p:cxnSp>
-      <p:sp>
-        <p:nvSpPr>
-          <p:cNvPr id="12" name="text11" descr="sci-ppt:C1-E03-011"/>
+              <a:t>∂φ/∂r = R²Ṙ / r² = u  ✓</a:t>
+            </a:r>
+          </a:p>
+        </p:txBody>
+      </p:sp>
+      <p:sp>
+        <p:nvSpPr>
+          <p:cNvPr id="50" name="C1-E03 text 48" descr="sci-ppt:o048"/>
           <p:cNvSpPr txBox="1"/>
           <p:nvPr/>
         </p:nvSpPr>
         <p:spPr>
           <a:xfrm>
-            <a:off x="5059680" y="2865120"/>
-            <a:ext cx="3291840" cy="321259"/>
+            <a:off x="7223760" y="3875278"/>
+            <a:ext cx="4480560" cy="247142"/>
           </a:xfrm>
           <a:prstGeom prst="rect">
             <a:avLst/>
@@ -3458,7 +5085,7 @@
           <a:effectLst/>
         </p:spPr>
         <p:txBody>
-          <a:bodyPr wrap="none" lIns="27432" rIns="27432" tIns="18288" bIns="18288" anchor="ctr">
+          <a:bodyPr wrap="none" lIns="18288" rIns="18288" tIns="18288" bIns="18288" anchor="t">
             <a:spAutoFit/>
           </a:bodyPr>
           <a:lstStyle/>
@@ -3469,39 +5096,55 @@
               </a:spcAft>
             </a:pPr>
             <a:r>
-              <a:rPr sz="1632" b="0" i="0">
+              <a:rPr sz="1300" b="1" i="0">
+                <a:solidFill>
+                  <a:srgbClr val="F2B880"/>
+                </a:solidFill>
+                <a:latin typeface="Arial"/>
+              </a:rPr>
+              <a:t>Why the reference is fixed first</a:t>
+            </a:r>
+          </a:p>
+        </p:txBody>
+      </p:sp>
+      <p:sp>
+        <p:nvSpPr>
+          <p:cNvPr id="51" name="C1-E03 text 49" descr="sci-ppt:o049"/>
+          <p:cNvSpPr txBox="1"/>
+          <p:nvPr/>
+        </p:nvSpPr>
+        <p:spPr>
+          <a:xfrm>
+            <a:off x="7360920" y="4122419"/>
+            <a:ext cx="4297680" cy="626745"/>
+          </a:xfrm>
+          <a:prstGeom prst="rect">
+            <a:avLst/>
+          </a:prstGeom>
+          <a:noFill/>
+          <a:effectLst/>
+        </p:spPr>
+        <p:txBody>
+          <a:bodyPr wrap="none" lIns="18288" rIns="18288" tIns="18288" bIns="18288" anchor="t">
+            <a:spAutoFit/>
+          </a:bodyPr>
+          <a:lstStyle/>
+          <a:p>
+            <a:pPr algn="l">
+              <a:spcAft>
+                <a:spcPts val="0"/>
+              </a:spcAft>
+            </a:pPr>
+            <a:r>
+              <a:rPr sz="1250" b="0" i="0">
                 <a:solidFill>
                   <a:srgbClr val="E7F0F3"/>
                 </a:solidFill>
                 <a:latin typeface="Arial"/>
               </a:rPr>
-              <a:t>+e_r (coordinate)</a:t>
-            </a:r>
-          </a:p>
-        </p:txBody>
-      </p:sp>
-      <p:sp>
-        <p:nvSpPr>
-          <p:cNvPr id="13" name="text12" descr="sci-ppt:C1-E03-012"/>
-          <p:cNvSpPr txBox="1"/>
-          <p:nvPr/>
-        </p:nvSpPr>
-        <p:spPr>
-          <a:xfrm>
-            <a:off x="1219200" y="4206240"/>
-            <a:ext cx="9753600" cy="340156"/>
-          </a:xfrm>
-          <a:prstGeom prst="rect">
-            <a:avLst/>
-          </a:prstGeom>
-          <a:noFill/>
-          <a:effectLst/>
-        </p:spPr>
-        <p:txBody>
-          <a:bodyPr wrap="none" lIns="27432" rIns="27432" tIns="18288" bIns="18288" anchor="ctr">
-            <a:spAutoFit/>
-          </a:bodyPr>
-          <a:lstStyle/>
+              <a:t>φ is defined only up to a constant. Setting φ(∞) =</a:t>
+            </a:r>
+          </a:p>
           <a:p>
             <a:pPr algn="l">
               <a:spcAft>
@@ -3509,39 +5152,15 @@
               </a:spcAft>
             </a:pPr>
             <a:r>
-              <a:rPr sz="1728" b="0" i="0">
+              <a:rPr sz="1250" b="0" i="0">
                 <a:solidFill>
                   <a:srgbClr val="E7F0F3"/>
                 </a:solidFill>
                 <a:latin typeface="Arial"/>
               </a:rPr>
-              <a:t>Signed wall speed: Ṙ; acceleration: R̈</a:t>
-            </a:r>
-          </a:p>
-        </p:txBody>
-      </p:sp>
-      <p:sp>
-        <p:nvSpPr>
-          <p:cNvPr id="14" name="text13" descr="sci-ppt:C1-E03-013"/>
-          <p:cNvSpPr txBox="1"/>
-          <p:nvPr/>
-        </p:nvSpPr>
-        <p:spPr>
-          <a:xfrm>
-            <a:off x="365760" y="4974336"/>
-            <a:ext cx="5547360" cy="321259"/>
-          </a:xfrm>
-          <a:prstGeom prst="rect">
-            <a:avLst/>
-          </a:prstGeom>
-          <a:noFill/>
-          <a:effectLst/>
-        </p:spPr>
-        <p:txBody>
-          <a:bodyPr wrap="none" lIns="27432" rIns="27432" tIns="18288" bIns="18288" anchor="ctr">
-            <a:spAutoFit/>
-          </a:bodyPr>
-          <a:lstStyle/>
+              <a:t>0 before taking any time derivative keeps Eq.</a:t>
+            </a:r>
+          </a:p>
           <a:p>
             <a:pPr algn="l">
               <a:spcAft>
@@ -3549,27 +5168,27 @@
               </a:spcAft>
             </a:pPr>
             <a:r>
-              <a:rPr sz="1632" b="0" i="0">
+              <a:rPr sz="1250" b="0" i="0">
                 <a:solidFill>
                   <a:srgbClr val="E7F0F3"/>
                 </a:solidFill>
                 <a:latin typeface="Arial"/>
               </a:rPr>
-              <a:t>φ(r,t)</a:t>
-            </a:r>
-          </a:p>
-        </p:txBody>
-      </p:sp>
-      <p:sp>
-        <p:nvSpPr>
-          <p:cNvPr id="15" name="text14" descr="sci-ppt:C1-E03-014"/>
+              <a:t>C1-E04 unambiguous.</a:t>
+            </a:r>
+          </a:p>
+        </p:txBody>
+      </p:sp>
+      <p:sp>
+        <p:nvSpPr>
+          <p:cNvPr id="52" name="C1-E03 text 50" descr="sci-ppt:o050"/>
           <p:cNvSpPr txBox="1"/>
           <p:nvPr/>
         </p:nvSpPr>
         <p:spPr>
           <a:xfrm>
-            <a:off x="365760" y="5266944"/>
-            <a:ext cx="5547360" cy="321259"/>
+            <a:off x="868680" y="5897880"/>
+            <a:ext cx="5760720" cy="239395"/>
           </a:xfrm>
           <a:prstGeom prst="rect">
             <a:avLst/>
@@ -3578,7 +5197,7 @@
           <a:effectLst/>
         </p:spPr>
         <p:txBody>
-          <a:bodyPr wrap="none" lIns="27432" rIns="27432" tIns="18288" bIns="18288" anchor="ctr">
+          <a:bodyPr wrap="none" lIns="18288" rIns="18288" tIns="18288" bIns="18288" anchor="t">
             <a:spAutoFit/>
           </a:bodyPr>
           <a:lstStyle/>
@@ -3589,27 +5208,27 @@
               </a:spcAft>
             </a:pPr>
             <a:r>
-              <a:rPr sz="1632" b="0" i="0">
+              <a:rPr sz="1250" b="0" i="0">
                 <a:solidFill>
-                  <a:srgbClr val="E7F0F3"/>
+                  <a:srgbClr val="B4C7D2"/>
                 </a:solidFill>
                 <a:latin typeface="Arial"/>
               </a:rPr>
-              <a:t>R</a:t>
-            </a:r>
-          </a:p>
-        </p:txBody>
-      </p:sp>
-      <p:sp>
-        <p:nvSpPr>
-          <p:cNvPr id="16" name="text15" descr="sci-ppt:C1-E03-015"/>
+              <a:t>Plot for R = 1, Ṙ = 1; the shape is the same for any R and Ṙ.</a:t>
+            </a:r>
+          </a:p>
+        </p:txBody>
+      </p:sp>
+      <p:sp>
+        <p:nvSpPr>
+          <p:cNvPr id="53" name="C1-E03 text 51" descr="sci-ppt:o051"/>
           <p:cNvSpPr txBox="1"/>
           <p:nvPr/>
         </p:nvSpPr>
         <p:spPr>
           <a:xfrm>
-            <a:off x="365760" y="5559552"/>
-            <a:ext cx="5547360" cy="321259"/>
+            <a:off x="320040" y="6510528"/>
+            <a:ext cx="11521440" cy="200660"/>
           </a:xfrm>
           <a:prstGeom prst="rect">
             <a:avLst/>
@@ -3618,7 +5237,7 @@
           <a:effectLst/>
         </p:spPr>
         <p:txBody>
-          <a:bodyPr wrap="none" lIns="27432" rIns="27432" tIns="18288" bIns="18288" anchor="ctr">
+          <a:bodyPr wrap="none" lIns="18288" rIns="18288" tIns="18288" bIns="18288" anchor="t">
             <a:spAutoFit/>
           </a:bodyPr>
           <a:lstStyle/>
@@ -3629,253 +5248,13 @@
               </a:spcAft>
             </a:pPr>
             <a:r>
-              <a:rPr sz="1632" b="0" i="0">
-                <a:solidFill>
-                  <a:srgbClr val="E7F0F3"/>
-                </a:solidFill>
-                <a:latin typeface="Arial"/>
-              </a:rPr>
-              <a:t>s: integration radius</a:t>
-            </a:r>
-          </a:p>
-        </p:txBody>
-      </p:sp>
-      <p:sp>
-        <p:nvSpPr>
-          <p:cNvPr id="17" name="text16" descr="sci-ppt:C1-E03-016"/>
-          <p:cNvSpPr txBox="1"/>
-          <p:nvPr/>
-        </p:nvSpPr>
-        <p:spPr>
-          <a:xfrm>
-            <a:off x="365760" y="5852160"/>
-            <a:ext cx="5547360" cy="321259"/>
-          </a:xfrm>
-          <a:prstGeom prst="rect">
-            <a:avLst/>
-          </a:prstGeom>
-          <a:noFill/>
-          <a:effectLst/>
-        </p:spPr>
-        <p:txBody>
-          <a:bodyPr wrap="none" lIns="27432" rIns="27432" tIns="18288" bIns="18288" anchor="ctr">
-            <a:spAutoFit/>
-          </a:bodyPr>
-          <a:lstStyle/>
-          <a:p>
-            <a:pPr algn="l">
-              <a:spcAft>
-                <a:spcPts val="0"/>
-              </a:spcAft>
-            </a:pPr>
-            <a:r>
-              <a:rPr sz="1632" b="0" i="0">
-                <a:solidFill>
-                  <a:srgbClr val="E7F0F3"/>
-                </a:solidFill>
-                <a:latin typeface="Arial"/>
-              </a:rPr>
-              <a:t>φ∞ = 0</a:t>
-            </a:r>
-          </a:p>
-        </p:txBody>
-      </p:sp>
-      <p:sp>
-        <p:nvSpPr>
-          <p:cNvPr id="18" name="text17" descr="sci-ppt:C1-E03-017"/>
-          <p:cNvSpPr txBox="1"/>
-          <p:nvPr/>
-        </p:nvSpPr>
-        <p:spPr>
-          <a:xfrm>
-            <a:off x="6156960" y="4974336"/>
-            <a:ext cx="5547360" cy="321259"/>
-          </a:xfrm>
-          <a:prstGeom prst="rect">
-            <a:avLst/>
-          </a:prstGeom>
-          <a:noFill/>
-          <a:effectLst/>
-        </p:spPr>
-        <p:txBody>
-          <a:bodyPr wrap="none" lIns="27432" rIns="27432" tIns="18288" bIns="18288" anchor="ctr">
-            <a:spAutoFit/>
-          </a:bodyPr>
-          <a:lstStyle/>
-          <a:p>
-            <a:pPr algn="l">
-              <a:spcAft>
-                <a:spcPts val="0"/>
-              </a:spcAft>
-            </a:pPr>
-            <a:r>
-              <a:rPr sz="1632" b="0" i="0">
-                <a:solidFill>
-                  <a:srgbClr val="E7F0F3"/>
-                </a:solidFill>
-                <a:latin typeface="Arial"/>
-              </a:rPr>
-              <a:t>r</a:t>
-            </a:r>
-          </a:p>
-        </p:txBody>
-      </p:sp>
-      <p:sp>
-        <p:nvSpPr>
-          <p:cNvPr id="19" name="text18" descr="sci-ppt:C1-E03-018"/>
-          <p:cNvSpPr txBox="1"/>
-          <p:nvPr/>
-        </p:nvSpPr>
-        <p:spPr>
-          <a:xfrm>
-            <a:off x="6156960" y="5266944"/>
-            <a:ext cx="5547360" cy="321259"/>
-          </a:xfrm>
-          <a:prstGeom prst="rect">
-            <a:avLst/>
-          </a:prstGeom>
-          <a:noFill/>
-          <a:effectLst/>
-        </p:spPr>
-        <p:txBody>
-          <a:bodyPr wrap="none" lIns="27432" rIns="27432" tIns="18288" bIns="18288" anchor="ctr">
-            <a:spAutoFit/>
-          </a:bodyPr>
-          <a:lstStyle/>
-          <a:p>
-            <a:pPr algn="l">
-              <a:spcAft>
-                <a:spcPts val="0"/>
-              </a:spcAft>
-            </a:pPr>
-            <a:r>
-              <a:rPr sz="1632" b="0" i="0">
-                <a:solidFill>
-                  <a:srgbClr val="E7F0F3"/>
-                </a:solidFill>
-                <a:latin typeface="Arial"/>
-              </a:rPr>
-              <a:t>Ṙ</a:t>
-            </a:r>
-          </a:p>
-        </p:txBody>
-      </p:sp>
-      <p:sp>
-        <p:nvSpPr>
-          <p:cNvPr id="20" name="text19" descr="sci-ppt:C1-E03-019"/>
-          <p:cNvSpPr txBox="1"/>
-          <p:nvPr/>
-        </p:nvSpPr>
-        <p:spPr>
-          <a:xfrm>
-            <a:off x="6156960" y="5559552"/>
-            <a:ext cx="5547360" cy="321259"/>
-          </a:xfrm>
-          <a:prstGeom prst="rect">
-            <a:avLst/>
-          </a:prstGeom>
-          <a:noFill/>
-          <a:effectLst/>
-        </p:spPr>
-        <p:txBody>
-          <a:bodyPr wrap="none" lIns="27432" rIns="27432" tIns="18288" bIns="18288" anchor="ctr">
-            <a:spAutoFit/>
-          </a:bodyPr>
-          <a:lstStyle/>
-          <a:p>
-            <a:pPr algn="l">
-              <a:spcAft>
-                <a:spcPts val="0"/>
-              </a:spcAft>
-            </a:pPr>
-            <a:r>
-              <a:rPr sz="1632" b="0" i="0">
-                <a:solidFill>
-                  <a:srgbClr val="E7F0F3"/>
-                </a:solidFill>
-                <a:latin typeface="Arial"/>
-              </a:rPr>
-              <a:t>u = ∂rφ</a:t>
-            </a:r>
-          </a:p>
-        </p:txBody>
-      </p:sp>
-      <p:sp>
-        <p:nvSpPr>
-          <p:cNvPr id="21" name="text20" descr="sci-ppt:C1-E03-020"/>
-          <p:cNvSpPr txBox="1"/>
-          <p:nvPr/>
-        </p:nvSpPr>
-        <p:spPr>
-          <a:xfrm>
-            <a:off x="6156960" y="5852160"/>
-            <a:ext cx="5547360" cy="321259"/>
-          </a:xfrm>
-          <a:prstGeom prst="rect">
-            <a:avLst/>
-          </a:prstGeom>
-          <a:noFill/>
-          <a:effectLst/>
-        </p:spPr>
-        <p:txBody>
-          <a:bodyPr wrap="none" lIns="27432" rIns="27432" tIns="18288" bIns="18288" anchor="ctr">
-            <a:spAutoFit/>
-          </a:bodyPr>
-          <a:lstStyle/>
-          <a:p>
-            <a:pPr algn="l">
-              <a:spcAft>
-                <a:spcPts val="0"/>
-              </a:spcAft>
-            </a:pPr>
-            <a:r>
-              <a:rPr sz="1632" b="0" i="0">
-                <a:solidFill>
-                  <a:srgbClr val="E7F0F3"/>
-                </a:solidFill>
-                <a:latin typeface="Arial"/>
-              </a:rPr>
-              <a:t>t</a:t>
-            </a:r>
-          </a:p>
-        </p:txBody>
-      </p:sp>
-      <p:sp>
-        <p:nvSpPr>
-          <p:cNvPr id="22" name="text21" descr="sci-ppt:C1-E03-021"/>
-          <p:cNvSpPr txBox="1"/>
-          <p:nvPr/>
-        </p:nvSpPr>
-        <p:spPr>
-          <a:xfrm>
-            <a:off x="365760" y="6339840"/>
-            <a:ext cx="11277600" cy="302361"/>
-          </a:xfrm>
-          <a:prstGeom prst="rect">
-            <a:avLst/>
-          </a:prstGeom>
-          <a:noFill/>
-          <a:effectLst/>
-        </p:spPr>
-        <p:txBody>
-          <a:bodyPr wrap="none" lIns="27432" rIns="27432" tIns="18288" bIns="18288" anchor="ctr">
-            <a:spAutoFit/>
-          </a:bodyPr>
-          <a:lstStyle/>
-          <a:p>
-            <a:pPr algn="l">
-              <a:spcAft>
-                <a:spcPts val="0"/>
-              </a:spcAft>
-            </a:pPr>
-            <a:r>
-              <a:rPr sz="1536" b="0" i="0">
+              <a:rPr sz="1000" b="0" i="0">
                 <a:solidFill>
                   <a:srgbClr val="B4C7D2"/>
                 </a:solidFill>
                 <a:latin typeface="Arial"/>
               </a:rPr>
-              <a:t>Differentiate spatially to recover the radial flow</a:t>
+              <a:t>Potential from Eq. C1-E03.</a:t>
             </a:r>
           </a:p>
         </p:txBody>
